--- a/output/doc/user-flow-decks/08-doctor-verification-and-collateral-consumption.pptx
+++ b/output/doc/user-flow-decks/08-doctor-verification-and-collateral-consumption.pptx
@@ -4433,7 +4433,7 @@
         <p:spPr>
           <a:xfrm>
             <a:off x="749808" y="1097280"/>
-            <a:ext cx="4023360" cy="256032"/>
+            <a:ext cx="3931920" cy="4754880"/>
           </a:xfrm>
           <a:prstGeom prst="rect">
             <a:avLst/>
@@ -4441,12 +4441,19 @@
           <a:noFill/>
         </p:spPr>
         <p:txBody>
-          <a:bodyPr wrap="square" anchor="t">
+          <a:bodyPr wrap="square" lIns="0" rIns="0" tIns="0" bIns="0">
             <a:spAutoFit/>
           </a:bodyPr>
           <a:lstStyle/>
           <a:p>
-            <a:pPr algn="l"/>
+            <a:pPr algn="l">
+              <a:spcBef>
+                <a:spcPts val="0"/>
+              </a:spcBef>
+              <a:spcAft>
+                <a:spcPts val="200"/>
+              </a:spcAft>
+            </a:pPr>
             <a:r>
               <a:rPr sz="1200" b="1">
                 <a:solidFill>
@@ -4457,33 +4464,20 @@
               <a:t>User action</a:t>
             </a:r>
           </a:p>
-        </p:txBody>
-      </p:sp>
-      <p:sp>
-        <p:nvSpPr>
-          <p:cNvPr id="8" name="TextBox 7"/>
-          <p:cNvSpPr txBox="1"/>
-          <p:nvPr/>
-        </p:nvSpPr>
-        <p:spPr>
-          <a:xfrm>
-            <a:off x="749808" y="1353312"/>
-            <a:ext cx="3931920" cy="621792"/>
-          </a:xfrm>
-          <a:prstGeom prst="rect">
-            <a:avLst/>
-          </a:prstGeom>
-          <a:noFill/>
-        </p:spPr>
-        <p:txBody>
-          <a:bodyPr wrap="square" anchor="t">
-            <a:spAutoFit/>
-          </a:bodyPr>
-          <a:lstStyle/>
-          <a:p>
-            <a:pPr algn="l"/>
-            <a:r>
-              <a:rPr sz="1600" b="0">
+          <a:p>
+            <a:pPr algn="l">
+              <a:lnSpc>
+                <a:spcPct val="110000"/>
+              </a:lnSpc>
+              <a:spcBef>
+                <a:spcPts val="0"/>
+              </a:spcBef>
+              <a:spcAft>
+                <a:spcPts val="800"/>
+              </a:spcAft>
+            </a:pPr>
+            <a:r>
+              <a:rPr sz="1400">
                 <a:solidFill>
                   <a:srgbClr val="102A43"/>
                 </a:solidFill>
@@ -4492,31 +4486,15 @@
               <a:t>Tap the short link from the WhatsApp message.</a:t>
             </a:r>
           </a:p>
-        </p:txBody>
-      </p:sp>
-      <p:sp>
-        <p:nvSpPr>
-          <p:cNvPr id="9" name="TextBox 8"/>
-          <p:cNvSpPr txBox="1"/>
-          <p:nvPr/>
-        </p:nvSpPr>
-        <p:spPr>
-          <a:xfrm>
-            <a:off x="749808" y="2011680"/>
-            <a:ext cx="4023360" cy="256032"/>
-          </a:xfrm>
-          <a:prstGeom prst="rect">
-            <a:avLst/>
-          </a:prstGeom>
-          <a:noFill/>
-        </p:spPr>
-        <p:txBody>
-          <a:bodyPr wrap="square" anchor="t">
-            <a:spAutoFit/>
-          </a:bodyPr>
-          <a:lstStyle/>
-          <a:p>
-            <a:pPr algn="l"/>
+          <a:p>
+            <a:pPr algn="l">
+              <a:spcBef>
+                <a:spcPts val="0"/>
+              </a:spcBef>
+              <a:spcAft>
+                <a:spcPts val="200"/>
+              </a:spcAft>
+            </a:pPr>
             <a:r>
               <a:rPr sz="1200" b="1">
                 <a:solidFill>
@@ -4527,33 +4505,20 @@
               <a:t>What appears on screen</a:t>
             </a:r>
           </a:p>
-        </p:txBody>
-      </p:sp>
-      <p:sp>
-        <p:nvSpPr>
-          <p:cNvPr id="10" name="TextBox 9"/>
-          <p:cNvSpPr txBox="1"/>
-          <p:nvPr/>
-        </p:nvSpPr>
-        <p:spPr>
-          <a:xfrm>
-            <a:off x="749808" y="2267712"/>
-            <a:ext cx="3931920" cy="713232"/>
-          </a:xfrm>
-          <a:prstGeom prst="rect">
-            <a:avLst/>
-          </a:prstGeom>
-          <a:noFill/>
-        </p:spPr>
-        <p:txBody>
-          <a:bodyPr wrap="square" anchor="t">
-            <a:spAutoFit/>
-          </a:bodyPr>
-          <a:lstStyle/>
-          <a:p>
-            <a:pPr algn="l"/>
-            <a:r>
-              <a:rPr sz="1600" b="0">
+          <a:p>
+            <a:pPr algn="l">
+              <a:lnSpc>
+                <a:spcPct val="110000"/>
+              </a:lnSpc>
+              <a:spcBef>
+                <a:spcPts val="0"/>
+              </a:spcBef>
+              <a:spcAft>
+                <a:spcPts val="800"/>
+              </a:spcAft>
+            </a:pPr>
+            <a:r>
+              <a:rPr sz="1400">
                 <a:solidFill>
                   <a:srgbClr val="102A43"/>
                 </a:solidFill>
@@ -4562,31 +4527,15 @@
               <a:t>A public Verify Access screen that asks for the WhatsApp number used during sharing and includes the floating support chatbot.</a:t>
             </a:r>
           </a:p>
-        </p:txBody>
-      </p:sp>
-      <p:sp>
-        <p:nvSpPr>
-          <p:cNvPr id="11" name="TextBox 10"/>
-          <p:cNvSpPr txBox="1"/>
-          <p:nvPr/>
-        </p:nvSpPr>
-        <p:spPr>
-          <a:xfrm>
-            <a:off x="749808" y="3063240"/>
-            <a:ext cx="4023360" cy="256032"/>
-          </a:xfrm>
-          <a:prstGeom prst="rect">
-            <a:avLst/>
-          </a:prstGeom>
-          <a:noFill/>
-        </p:spPr>
-        <p:txBody>
-          <a:bodyPr wrap="square" anchor="t">
-            <a:spAutoFit/>
-          </a:bodyPr>
-          <a:lstStyle/>
-          <a:p>
-            <a:pPr algn="l"/>
+          <a:p>
+            <a:pPr algn="l">
+              <a:spcBef>
+                <a:spcPts val="0"/>
+              </a:spcBef>
+              <a:spcAft>
+                <a:spcPts val="200"/>
+              </a:spcAft>
+            </a:pPr>
             <a:r>
               <a:rPr sz="1200" b="1">
                 <a:solidFill>
@@ -4597,33 +4546,20 @@
               <a:t>Why it matters</a:t>
             </a:r>
           </a:p>
-        </p:txBody>
-      </p:sp>
-      <p:sp>
-        <p:nvSpPr>
-          <p:cNvPr id="12" name="TextBox 11"/>
-          <p:cNvSpPr txBox="1"/>
-          <p:nvPr/>
-        </p:nvSpPr>
-        <p:spPr>
-          <a:xfrm>
-            <a:off x="749808" y="3319272"/>
-            <a:ext cx="3931920" cy="640080"/>
-          </a:xfrm>
-          <a:prstGeom prst="rect">
-            <a:avLst/>
-          </a:prstGeom>
-          <a:noFill/>
-        </p:spPr>
-        <p:txBody>
-          <a:bodyPr wrap="square" anchor="t">
-            <a:spAutoFit/>
-          </a:bodyPr>
-          <a:lstStyle/>
-          <a:p>
-            <a:pPr algn="l"/>
-            <a:r>
-              <a:rPr sz="1500" b="0">
+          <a:p>
+            <a:pPr algn="l">
+              <a:lnSpc>
+                <a:spcPct val="110000"/>
+              </a:lnSpc>
+              <a:spcBef>
+                <a:spcPts val="0"/>
+              </a:spcBef>
+              <a:spcAft>
+                <a:spcPts val="800"/>
+              </a:spcAft>
+            </a:pPr>
+            <a:r>
+              <a:rPr sz="1400">
                 <a:solidFill>
                   <a:srgbClr val="102A43"/>
                 </a:solidFill>
@@ -4632,31 +4568,15 @@
               <a:t>This prevents the collateral from behaving like an unguarded public file link.</a:t>
             </a:r>
           </a:p>
-        </p:txBody>
-      </p:sp>
-      <p:sp>
-        <p:nvSpPr>
-          <p:cNvPr id="13" name="TextBox 12"/>
-          <p:cNvSpPr txBox="1"/>
-          <p:nvPr/>
-        </p:nvSpPr>
-        <p:spPr>
-          <a:xfrm>
-            <a:off x="749808" y="4069080"/>
-            <a:ext cx="4023360" cy="256032"/>
-          </a:xfrm>
-          <a:prstGeom prst="rect">
-            <a:avLst/>
-          </a:prstGeom>
-          <a:noFill/>
-        </p:spPr>
-        <p:txBody>
-          <a:bodyPr wrap="square" anchor="t">
-            <a:spAutoFit/>
-          </a:bodyPr>
-          <a:lstStyle/>
-          <a:p>
-            <a:pPr algn="l"/>
+          <a:p>
+            <a:pPr algn="l">
+              <a:spcBef>
+                <a:spcPts val="0"/>
+              </a:spcBef>
+              <a:spcAft>
+                <a:spcPts val="200"/>
+              </a:spcAft>
+            </a:pPr>
             <a:r>
               <a:rPr sz="1200" b="1">
                 <a:solidFill>
@@ -4667,33 +4587,20 @@
               <a:t>Expected result</a:t>
             </a:r>
           </a:p>
-        </p:txBody>
-      </p:sp>
-      <p:sp>
-        <p:nvSpPr>
-          <p:cNvPr id="14" name="TextBox 13"/>
-          <p:cNvSpPr txBox="1"/>
-          <p:nvPr/>
-        </p:nvSpPr>
-        <p:spPr>
-          <a:xfrm>
-            <a:off x="749808" y="4325112"/>
-            <a:ext cx="3931920" cy="566928"/>
-          </a:xfrm>
-          <a:prstGeom prst="rect">
-            <a:avLst/>
-          </a:prstGeom>
-          <a:noFill/>
-        </p:spPr>
-        <p:txBody>
-          <a:bodyPr wrap="square" anchor="t">
-            <a:spAutoFit/>
-          </a:bodyPr>
-          <a:lstStyle/>
-          <a:p>
-            <a:pPr algn="l"/>
-            <a:r>
-              <a:rPr sz="1500" b="0">
+          <a:p>
+            <a:pPr algn="l">
+              <a:lnSpc>
+                <a:spcPct val="110000"/>
+              </a:lnSpc>
+              <a:spcBef>
+                <a:spcPts val="0"/>
+              </a:spcBef>
+              <a:spcAft>
+                <a:spcPts val="800"/>
+              </a:spcAft>
+            </a:pPr>
+            <a:r>
+              <a:rPr sz="1400">
                 <a:solidFill>
                   <a:srgbClr val="102A43"/>
                 </a:solidFill>
@@ -4702,31 +4609,15 @@
               <a:t>The doctor is ready to prove they are the intended recipient.</a:t>
             </a:r>
           </a:p>
-        </p:txBody>
-      </p:sp>
-      <p:sp>
-        <p:nvSpPr>
-          <p:cNvPr id="15" name="TextBox 14"/>
-          <p:cNvSpPr txBox="1"/>
-          <p:nvPr/>
-        </p:nvSpPr>
-        <p:spPr>
-          <a:xfrm>
-            <a:off x="749808" y="4965192"/>
-            <a:ext cx="4023360" cy="256032"/>
-          </a:xfrm>
-          <a:prstGeom prst="rect">
-            <a:avLst/>
-          </a:prstGeom>
-          <a:noFill/>
-        </p:spPr>
-        <p:txBody>
-          <a:bodyPr wrap="square" anchor="t">
-            <a:spAutoFit/>
-          </a:bodyPr>
-          <a:lstStyle/>
-          <a:p>
-            <a:pPr algn="l"/>
+          <a:p>
+            <a:pPr algn="l">
+              <a:spcBef>
+                <a:spcPts val="0"/>
+              </a:spcBef>
+              <a:spcAft>
+                <a:spcPts val="200"/>
+              </a:spcAft>
+            </a:pPr>
             <a:r>
               <a:rPr sz="1200" b="1">
                 <a:solidFill>
@@ -4737,33 +4628,20 @@
               <a:t>Trainer note</a:t>
             </a:r>
           </a:p>
-        </p:txBody>
-      </p:sp>
-      <p:sp>
-        <p:nvSpPr>
-          <p:cNvPr id="16" name="TextBox 15"/>
-          <p:cNvSpPr txBox="1"/>
-          <p:nvPr/>
-        </p:nvSpPr>
-        <p:spPr>
-          <a:xfrm>
-            <a:off x="749808" y="5212080"/>
-            <a:ext cx="3931920" cy="640080"/>
-          </a:xfrm>
-          <a:prstGeom prst="rect">
-            <a:avLst/>
-          </a:prstGeom>
-          <a:noFill/>
-        </p:spPr>
-        <p:txBody>
-          <a:bodyPr wrap="square" anchor="t">
-            <a:spAutoFit/>
-          </a:bodyPr>
-          <a:lstStyle/>
-          <a:p>
-            <a:pPr algn="l"/>
-            <a:r>
-              <a:rPr sz="1300" b="0">
+          <a:p>
+            <a:pPr algn="l">
+              <a:lnSpc>
+                <a:spcPct val="110000"/>
+              </a:lnSpc>
+              <a:spcBef>
+                <a:spcPts val="0"/>
+              </a:spcBef>
+              <a:spcAft>
+                <a:spcPts val="0"/>
+              </a:spcAft>
+            </a:pPr>
+            <a:r>
+              <a:rPr sz="1300">
                 <a:solidFill>
                   <a:srgbClr val="52667A"/>
                 </a:solidFill>
@@ -4776,7 +4654,7 @@
       </p:sp>
       <p:sp>
         <p:nvSpPr>
-          <p:cNvPr id="17" name="Rounded Rectangle 16"/>
+          <p:cNvPr id="8" name="Rounded Rectangle 7"/>
           <p:cNvSpPr/>
           <p:nvPr/>
         </p:nvSpPr>
@@ -4821,7 +4699,7 @@
       </p:sp>
       <p:sp>
         <p:nvSpPr>
-          <p:cNvPr id="18" name="TextBox 17"/>
+          <p:cNvPr id="9" name="TextBox 8"/>
           <p:cNvSpPr txBox="1"/>
           <p:nvPr/>
         </p:nvSpPr>
@@ -4856,7 +4734,7 @@
       </p:sp>
       <p:pic>
         <p:nvPicPr>
-          <p:cNvPr id="19" name="Picture 18" descr="doctor-verify.png"/>
+          <p:cNvPr id="10" name="Picture 9" descr="doctor-verify.png"/>
           <p:cNvPicPr>
             <a:picLocks noChangeAspect="1"/>
           </p:cNvPicPr>
@@ -4880,7 +4758,7 @@
       </p:pic>
       <p:sp>
         <p:nvSpPr>
-          <p:cNvPr id="20" name="TextBox 19"/>
+          <p:cNvPr id="11" name="TextBox 10"/>
           <p:cNvSpPr txBox="1"/>
           <p:nvPr/>
         </p:nvSpPr>
@@ -4915,7 +4793,7 @@
       </p:sp>
       <p:sp>
         <p:nvSpPr>
-          <p:cNvPr id="21" name="TextBox 20"/>
+          <p:cNvPr id="12" name="TextBox 11"/>
           <p:cNvSpPr txBox="1"/>
           <p:nvPr/>
         </p:nvSpPr>
@@ -5188,7 +5066,7 @@
         <p:spPr>
           <a:xfrm>
             <a:off x="749808" y="1097280"/>
-            <a:ext cx="4023360" cy="256032"/>
+            <a:ext cx="3931920" cy="4754880"/>
           </a:xfrm>
           <a:prstGeom prst="rect">
             <a:avLst/>
@@ -5196,12 +5074,19 @@
           <a:noFill/>
         </p:spPr>
         <p:txBody>
-          <a:bodyPr wrap="square" anchor="t">
+          <a:bodyPr wrap="square" lIns="0" rIns="0" tIns="0" bIns="0">
             <a:spAutoFit/>
           </a:bodyPr>
           <a:lstStyle/>
           <a:p>
-            <a:pPr algn="l"/>
+            <a:pPr algn="l">
+              <a:spcBef>
+                <a:spcPts val="0"/>
+              </a:spcBef>
+              <a:spcAft>
+                <a:spcPts val="200"/>
+              </a:spcAft>
+            </a:pPr>
             <a:r>
               <a:rPr sz="1200" b="1">
                 <a:solidFill>
@@ -5212,33 +5097,20 @@
               <a:t>User action</a:t>
             </a:r>
           </a:p>
-        </p:txBody>
-      </p:sp>
-      <p:sp>
-        <p:nvSpPr>
-          <p:cNvPr id="8" name="TextBox 7"/>
-          <p:cNvSpPr txBox="1"/>
-          <p:nvPr/>
-        </p:nvSpPr>
-        <p:spPr>
-          <a:xfrm>
-            <a:off x="749808" y="1353312"/>
-            <a:ext cx="3931920" cy="621792"/>
-          </a:xfrm>
-          <a:prstGeom prst="rect">
-            <a:avLst/>
-          </a:prstGeom>
-          <a:noFill/>
-        </p:spPr>
-        <p:txBody>
-          <a:bodyPr wrap="square" anchor="t">
-            <a:spAutoFit/>
-          </a:bodyPr>
-          <a:lstStyle/>
-          <a:p>
-            <a:pPr algn="l"/>
-            <a:r>
-              <a:rPr sz="1600" b="0">
+          <a:p>
+            <a:pPr algn="l">
+              <a:lnSpc>
+                <a:spcPct val="110000"/>
+              </a:lnSpc>
+              <a:spcBef>
+                <a:spcPts val="0"/>
+              </a:spcBef>
+              <a:spcAft>
+                <a:spcPts val="800"/>
+              </a:spcAft>
+            </a:pPr>
+            <a:r>
+              <a:rPr sz="1300">
                 <a:solidFill>
                   <a:srgbClr val="102A43"/>
                 </a:solidFill>
@@ -5247,31 +5119,15 @@
               <a:t>Enter the matching 10-digit number and submit the form.</a:t>
             </a:r>
           </a:p>
-        </p:txBody>
-      </p:sp>
-      <p:sp>
-        <p:nvSpPr>
-          <p:cNvPr id="9" name="TextBox 8"/>
-          <p:cNvSpPr txBox="1"/>
-          <p:nvPr/>
-        </p:nvSpPr>
-        <p:spPr>
-          <a:xfrm>
-            <a:off x="749808" y="2011680"/>
-            <a:ext cx="4023360" cy="256032"/>
-          </a:xfrm>
-          <a:prstGeom prst="rect">
-            <a:avLst/>
-          </a:prstGeom>
-          <a:noFill/>
-        </p:spPr>
-        <p:txBody>
-          <a:bodyPr wrap="square" anchor="t">
-            <a:spAutoFit/>
-          </a:bodyPr>
-          <a:lstStyle/>
-          <a:p>
-            <a:pPr algn="l"/>
+          <a:p>
+            <a:pPr algn="l">
+              <a:spcBef>
+                <a:spcPts val="0"/>
+              </a:spcBef>
+              <a:spcAft>
+                <a:spcPts val="200"/>
+              </a:spcAft>
+            </a:pPr>
             <a:r>
               <a:rPr sz="1200" b="1">
                 <a:solidFill>
@@ -5282,33 +5138,20 @@
               <a:t>What appears on screen</a:t>
             </a:r>
           </a:p>
-        </p:txBody>
-      </p:sp>
-      <p:sp>
-        <p:nvSpPr>
-          <p:cNvPr id="10" name="TextBox 9"/>
-          <p:cNvSpPr txBox="1"/>
-          <p:nvPr/>
-        </p:nvSpPr>
-        <p:spPr>
-          <a:xfrm>
-            <a:off x="749808" y="2267712"/>
-            <a:ext cx="3931920" cy="713232"/>
-          </a:xfrm>
-          <a:prstGeom prst="rect">
-            <a:avLst/>
-          </a:prstGeom>
-          <a:noFill/>
-        </p:spPr>
-        <p:txBody>
-          <a:bodyPr wrap="square" anchor="t">
-            <a:spAutoFit/>
-          </a:bodyPr>
-          <a:lstStyle/>
-          <a:p>
-            <a:pPr algn="l"/>
-            <a:r>
-              <a:rPr sz="1600" b="0">
+          <a:p>
+            <a:pPr algn="l">
+              <a:lnSpc>
+                <a:spcPct val="110000"/>
+              </a:lnSpc>
+              <a:spcBef>
+                <a:spcPts val="0"/>
+              </a:spcBef>
+              <a:spcAft>
+                <a:spcPts val="800"/>
+              </a:spcAft>
+            </a:pPr>
+            <a:r>
+              <a:rPr sz="1300">
                 <a:solidFill>
                   <a:srgbClr val="102A43"/>
                 </a:solidFill>
@@ -5317,31 +5160,15 @@
               <a:t>A successful handoff into the doctor viewer instead of an access-denied message, with the unlocked collateral title and content area visible immediately.</a:t>
             </a:r>
           </a:p>
-        </p:txBody>
-      </p:sp>
-      <p:sp>
-        <p:nvSpPr>
-          <p:cNvPr id="11" name="TextBox 10"/>
-          <p:cNvSpPr txBox="1"/>
-          <p:nvPr/>
-        </p:nvSpPr>
-        <p:spPr>
-          <a:xfrm>
-            <a:off x="749808" y="3063240"/>
-            <a:ext cx="4023360" cy="256032"/>
-          </a:xfrm>
-          <a:prstGeom prst="rect">
-            <a:avLst/>
-          </a:prstGeom>
-          <a:noFill/>
-        </p:spPr>
-        <p:txBody>
-          <a:bodyPr wrap="square" anchor="t">
-            <a:spAutoFit/>
-          </a:bodyPr>
-          <a:lstStyle/>
-          <a:p>
-            <a:pPr algn="l"/>
+          <a:p>
+            <a:pPr algn="l">
+              <a:spcBef>
+                <a:spcPts val="0"/>
+              </a:spcBef>
+              <a:spcAft>
+                <a:spcPts val="200"/>
+              </a:spcAft>
+            </a:pPr>
             <a:r>
               <a:rPr sz="1200" b="1">
                 <a:solidFill>
@@ -5352,33 +5179,20 @@
               <a:t>Why it matters</a:t>
             </a:r>
           </a:p>
-        </p:txBody>
-      </p:sp>
-      <p:sp>
-        <p:nvSpPr>
-          <p:cNvPr id="12" name="TextBox 11"/>
-          <p:cNvSpPr txBox="1"/>
-          <p:nvPr/>
-        </p:nvSpPr>
-        <p:spPr>
-          <a:xfrm>
-            <a:off x="749808" y="3319272"/>
-            <a:ext cx="3931920" cy="640080"/>
-          </a:xfrm>
-          <a:prstGeom prst="rect">
-            <a:avLst/>
-          </a:prstGeom>
-          <a:noFill/>
-        </p:spPr>
-        <p:txBody>
-          <a:bodyPr wrap="square" anchor="t">
-            <a:spAutoFit/>
-          </a:bodyPr>
-          <a:lstStyle/>
-          <a:p>
-            <a:pPr algn="l"/>
-            <a:r>
-              <a:rPr sz="1500" b="0">
+          <a:p>
+            <a:pPr algn="l">
+              <a:lnSpc>
+                <a:spcPct val="110000"/>
+              </a:lnSpc>
+              <a:spcBef>
+                <a:spcPts val="0"/>
+              </a:spcBef>
+              <a:spcAft>
+                <a:spcPts val="800"/>
+              </a:spcAft>
+            </a:pPr>
+            <a:r>
+              <a:rPr sz="1300">
                 <a:solidFill>
                   <a:srgbClr val="102A43"/>
                 </a:solidFill>
@@ -5387,31 +5201,15 @@
               <a:t>The matching logic is what binds the public doctor experience back to a specific share log and grants download access for that short link.</a:t>
             </a:r>
           </a:p>
-        </p:txBody>
-      </p:sp>
-      <p:sp>
-        <p:nvSpPr>
-          <p:cNvPr id="13" name="TextBox 12"/>
-          <p:cNvSpPr txBox="1"/>
-          <p:nvPr/>
-        </p:nvSpPr>
-        <p:spPr>
-          <a:xfrm>
-            <a:off x="749808" y="4069080"/>
-            <a:ext cx="4023360" cy="256032"/>
-          </a:xfrm>
-          <a:prstGeom prst="rect">
-            <a:avLst/>
-          </a:prstGeom>
-          <a:noFill/>
-        </p:spPr>
-        <p:txBody>
-          <a:bodyPr wrap="square" anchor="t">
-            <a:spAutoFit/>
-          </a:bodyPr>
-          <a:lstStyle/>
-          <a:p>
-            <a:pPr algn="l"/>
+          <a:p>
+            <a:pPr algn="l">
+              <a:spcBef>
+                <a:spcPts val="0"/>
+              </a:spcBef>
+              <a:spcAft>
+                <a:spcPts val="200"/>
+              </a:spcAft>
+            </a:pPr>
             <a:r>
               <a:rPr sz="1200" b="1">
                 <a:solidFill>
@@ -5422,33 +5220,20 @@
               <a:t>Expected result</a:t>
             </a:r>
           </a:p>
-        </p:txBody>
-      </p:sp>
-      <p:sp>
-        <p:nvSpPr>
-          <p:cNvPr id="14" name="TextBox 13"/>
-          <p:cNvSpPr txBox="1"/>
-          <p:nvPr/>
-        </p:nvSpPr>
-        <p:spPr>
-          <a:xfrm>
-            <a:off x="749808" y="4325112"/>
-            <a:ext cx="3931920" cy="566928"/>
-          </a:xfrm>
-          <a:prstGeom prst="rect">
-            <a:avLst/>
-          </a:prstGeom>
-          <a:noFill/>
-        </p:spPr>
-        <p:txBody>
-          <a:bodyPr wrap="square" anchor="t">
-            <a:spAutoFit/>
-          </a:bodyPr>
-          <a:lstStyle/>
-          <a:p>
-            <a:pPr algn="l"/>
-            <a:r>
-              <a:rPr sz="1500" b="0">
+          <a:p>
+            <a:pPr algn="l">
+              <a:lnSpc>
+                <a:spcPct val="110000"/>
+              </a:lnSpc>
+              <a:spcBef>
+                <a:spcPts val="0"/>
+              </a:spcBef>
+              <a:spcAft>
+                <a:spcPts val="800"/>
+              </a:spcAft>
+            </a:pPr>
+            <a:r>
+              <a:rPr sz="1300">
                 <a:solidFill>
                   <a:srgbClr val="102A43"/>
                 </a:solidFill>
@@ -5457,31 +5242,15 @@
               <a:t>The doctor gains access to the content and engagement tracking starts.</a:t>
             </a:r>
           </a:p>
-        </p:txBody>
-      </p:sp>
-      <p:sp>
-        <p:nvSpPr>
-          <p:cNvPr id="15" name="TextBox 14"/>
-          <p:cNvSpPr txBox="1"/>
-          <p:nvPr/>
-        </p:nvSpPr>
-        <p:spPr>
-          <a:xfrm>
-            <a:off x="749808" y="4965192"/>
-            <a:ext cx="4023360" cy="256032"/>
-          </a:xfrm>
-          <a:prstGeom prst="rect">
-            <a:avLst/>
-          </a:prstGeom>
-          <a:noFill/>
-        </p:spPr>
-        <p:txBody>
-          <a:bodyPr wrap="square" anchor="t">
-            <a:spAutoFit/>
-          </a:bodyPr>
-          <a:lstStyle/>
-          <a:p>
-            <a:pPr algn="l"/>
+          <a:p>
+            <a:pPr algn="l">
+              <a:spcBef>
+                <a:spcPts val="0"/>
+              </a:spcBef>
+              <a:spcAft>
+                <a:spcPts val="200"/>
+              </a:spcAft>
+            </a:pPr>
             <a:r>
               <a:rPr sz="1200" b="1">
                 <a:solidFill>
@@ -5492,33 +5261,20 @@
               <a:t>Trainer note</a:t>
             </a:r>
           </a:p>
-        </p:txBody>
-      </p:sp>
-      <p:sp>
-        <p:nvSpPr>
-          <p:cNvPr id="16" name="TextBox 15"/>
-          <p:cNvSpPr txBox="1"/>
-          <p:nvPr/>
-        </p:nvSpPr>
-        <p:spPr>
-          <a:xfrm>
-            <a:off x="749808" y="5212080"/>
-            <a:ext cx="3931920" cy="640080"/>
-          </a:xfrm>
-          <a:prstGeom prst="rect">
-            <a:avLst/>
-          </a:prstGeom>
-          <a:noFill/>
-        </p:spPr>
-        <p:txBody>
-          <a:bodyPr wrap="square" anchor="t">
-            <a:spAutoFit/>
-          </a:bodyPr>
-          <a:lstStyle/>
-          <a:p>
-            <a:pPr algn="l"/>
-            <a:r>
-              <a:rPr sz="1300" b="0">
+          <a:p>
+            <a:pPr algn="l">
+              <a:lnSpc>
+                <a:spcPct val="110000"/>
+              </a:lnSpc>
+              <a:spcBef>
+                <a:spcPts val="0"/>
+              </a:spcBef>
+              <a:spcAft>
+                <a:spcPts val="0"/>
+              </a:spcAft>
+            </a:pPr>
+            <a:r>
+              <a:rPr sz="1200">
                 <a:solidFill>
                   <a:srgbClr val="52667A"/>
                 </a:solidFill>
@@ -5531,7 +5287,7 @@
       </p:sp>
       <p:sp>
         <p:nvSpPr>
-          <p:cNvPr id="17" name="Rounded Rectangle 16"/>
+          <p:cNvPr id="8" name="Rounded Rectangle 7"/>
           <p:cNvSpPr/>
           <p:nvPr/>
         </p:nvSpPr>
@@ -5576,7 +5332,7 @@
       </p:sp>
       <p:sp>
         <p:nvSpPr>
-          <p:cNvPr id="18" name="TextBox 17"/>
+          <p:cNvPr id="9" name="TextBox 8"/>
           <p:cNvSpPr txBox="1"/>
           <p:nvPr/>
         </p:nvSpPr>
@@ -5611,7 +5367,7 @@
       </p:sp>
       <p:pic>
         <p:nvPicPr>
-          <p:cNvPr id="19" name="Picture 18" descr="doctor-viewer.png"/>
+          <p:cNvPr id="10" name="Picture 9" descr="doctor-viewer.png"/>
           <p:cNvPicPr>
             <a:picLocks noChangeAspect="1"/>
           </p:cNvPicPr>
@@ -5635,7 +5391,7 @@
       </p:pic>
       <p:sp>
         <p:nvSpPr>
-          <p:cNvPr id="20" name="TextBox 19"/>
+          <p:cNvPr id="11" name="TextBox 10"/>
           <p:cNvSpPr txBox="1"/>
           <p:nvPr/>
         </p:nvSpPr>
@@ -5670,7 +5426,7 @@
       </p:sp>
       <p:sp>
         <p:nvSpPr>
-          <p:cNvPr id="21" name="TextBox 20"/>
+          <p:cNvPr id="12" name="TextBox 11"/>
           <p:cNvSpPr txBox="1"/>
           <p:nvPr/>
         </p:nvSpPr>
@@ -5943,7 +5699,7 @@
         <p:spPr>
           <a:xfrm>
             <a:off x="749808" y="1097280"/>
-            <a:ext cx="4023360" cy="256032"/>
+            <a:ext cx="3931920" cy="4754880"/>
           </a:xfrm>
           <a:prstGeom prst="rect">
             <a:avLst/>
@@ -5951,12 +5707,19 @@
           <a:noFill/>
         </p:spPr>
         <p:txBody>
-          <a:bodyPr wrap="square" anchor="t">
+          <a:bodyPr wrap="square" lIns="0" rIns="0" tIns="0" bIns="0">
             <a:spAutoFit/>
           </a:bodyPr>
           <a:lstStyle/>
           <a:p>
-            <a:pPr algn="l"/>
+            <a:pPr algn="l">
+              <a:spcBef>
+                <a:spcPts val="0"/>
+              </a:spcBef>
+              <a:spcAft>
+                <a:spcPts val="200"/>
+              </a:spcAft>
+            </a:pPr>
             <a:r>
               <a:rPr sz="1200" b="1">
                 <a:solidFill>
@@ -5967,33 +5730,20 @@
               <a:t>User action</a:t>
             </a:r>
           </a:p>
-        </p:txBody>
-      </p:sp>
-      <p:sp>
-        <p:nvSpPr>
-          <p:cNvPr id="8" name="TextBox 7"/>
-          <p:cNvSpPr txBox="1"/>
-          <p:nvPr/>
-        </p:nvSpPr>
-        <p:spPr>
-          <a:xfrm>
-            <a:off x="749808" y="1353312"/>
-            <a:ext cx="3931920" cy="621792"/>
-          </a:xfrm>
-          <a:prstGeom prst="rect">
-            <a:avLst/>
-          </a:prstGeom>
-          <a:noFill/>
-        </p:spPr>
-        <p:txBody>
-          <a:bodyPr wrap="square" anchor="t">
-            <a:spAutoFit/>
-          </a:bodyPr>
-          <a:lstStyle/>
-          <a:p>
-            <a:pPr algn="l"/>
-            <a:r>
-              <a:rPr sz="1600" b="0">
+          <a:p>
+            <a:pPr algn="l">
+              <a:lnSpc>
+                <a:spcPct val="110000"/>
+              </a:lnSpc>
+              <a:spcBef>
+                <a:spcPts val="0"/>
+              </a:spcBef>
+              <a:spcAft>
+                <a:spcPts val="800"/>
+              </a:spcAft>
+            </a:pPr>
+            <a:r>
+              <a:rPr sz="1200">
                 <a:solidFill>
                   <a:srgbClr val="102A43"/>
                 </a:solidFill>
@@ -6002,31 +5752,15 @@
               <a:t>Scroll the PDF, watch the embedded video, or download the PDF copy.</a:t>
             </a:r>
           </a:p>
-        </p:txBody>
-      </p:sp>
-      <p:sp>
-        <p:nvSpPr>
-          <p:cNvPr id="9" name="TextBox 8"/>
-          <p:cNvSpPr txBox="1"/>
-          <p:nvPr/>
-        </p:nvSpPr>
-        <p:spPr>
-          <a:xfrm>
-            <a:off x="749808" y="2011680"/>
-            <a:ext cx="4023360" cy="256032"/>
-          </a:xfrm>
-          <a:prstGeom prst="rect">
-            <a:avLst/>
-          </a:prstGeom>
-          <a:noFill/>
-        </p:spPr>
-        <p:txBody>
-          <a:bodyPr wrap="square" anchor="t">
-            <a:spAutoFit/>
-          </a:bodyPr>
-          <a:lstStyle/>
-          <a:p>
-            <a:pPr algn="l"/>
+          <a:p>
+            <a:pPr algn="l">
+              <a:spcBef>
+                <a:spcPts val="0"/>
+              </a:spcBef>
+              <a:spcAft>
+                <a:spcPts val="200"/>
+              </a:spcAft>
+            </a:pPr>
             <a:r>
               <a:rPr sz="1200" b="1">
                 <a:solidFill>
@@ -6037,33 +5771,20 @@
               <a:t>What appears on screen</a:t>
             </a:r>
           </a:p>
-        </p:txBody>
-      </p:sp>
-      <p:sp>
-        <p:nvSpPr>
-          <p:cNvPr id="10" name="TextBox 9"/>
-          <p:cNvSpPr txBox="1"/>
-          <p:nvPr/>
-        </p:nvSpPr>
-        <p:spPr>
-          <a:xfrm>
-            <a:off x="749808" y="2267712"/>
-            <a:ext cx="3931920" cy="713232"/>
-          </a:xfrm>
-          <a:prstGeom prst="rect">
-            <a:avLst/>
-          </a:prstGeom>
-          <a:noFill/>
-        </p:spPr>
-        <p:txBody>
-          <a:bodyPr wrap="square" anchor="t">
-            <a:spAutoFit/>
-          </a:bodyPr>
-          <a:lstStyle/>
-          <a:p>
-            <a:pPr algn="l"/>
-            <a:r>
-              <a:rPr sz="1600" b="0">
+          <a:p>
+            <a:pPr algn="l">
+              <a:lnSpc>
+                <a:spcPct val="110000"/>
+              </a:lnSpc>
+              <a:spcBef>
+                <a:spcPts val="0"/>
+              </a:spcBef>
+              <a:spcAft>
+                <a:spcPts val="800"/>
+              </a:spcAft>
+            </a:pPr>
+            <a:r>
+              <a:rPr sz="1200">
                 <a:solidFill>
                   <a:srgbClr val="102A43"/>
                 </a:solidFill>
@@ -6072,31 +5793,15 @@
               <a:t>A branded viewer with banners, embedded Vimeo player, download button, and an auto-loading PDF area that adapts to the device type.</a:t>
             </a:r>
           </a:p>
-        </p:txBody>
-      </p:sp>
-      <p:sp>
-        <p:nvSpPr>
-          <p:cNvPr id="11" name="TextBox 10"/>
-          <p:cNvSpPr txBox="1"/>
-          <p:nvPr/>
-        </p:nvSpPr>
-        <p:spPr>
-          <a:xfrm>
-            <a:off x="749808" y="3063240"/>
-            <a:ext cx="4023360" cy="256032"/>
-          </a:xfrm>
-          <a:prstGeom prst="rect">
-            <a:avLst/>
-          </a:prstGeom>
-          <a:noFill/>
-        </p:spPr>
-        <p:txBody>
-          <a:bodyPr wrap="square" anchor="t">
-            <a:spAutoFit/>
-          </a:bodyPr>
-          <a:lstStyle/>
-          <a:p>
-            <a:pPr algn="l"/>
+          <a:p>
+            <a:pPr algn="l">
+              <a:spcBef>
+                <a:spcPts val="0"/>
+              </a:spcBef>
+              <a:spcAft>
+                <a:spcPts val="200"/>
+              </a:spcAft>
+            </a:pPr>
             <a:r>
               <a:rPr sz="1200" b="1">
                 <a:solidFill>
@@ -6107,33 +5812,20 @@
               <a:t>Why it matters</a:t>
             </a:r>
           </a:p>
-        </p:txBody>
-      </p:sp>
-      <p:sp>
-        <p:nvSpPr>
-          <p:cNvPr id="12" name="TextBox 11"/>
-          <p:cNvSpPr txBox="1"/>
-          <p:nvPr/>
-        </p:nvSpPr>
-        <p:spPr>
-          <a:xfrm>
-            <a:off x="749808" y="3319272"/>
-            <a:ext cx="3931920" cy="640080"/>
-          </a:xfrm>
-          <a:prstGeom prst="rect">
-            <a:avLst/>
-          </a:prstGeom>
-          <a:noFill/>
-        </p:spPr>
-        <p:txBody>
-          <a:bodyPr wrap="square" anchor="t">
-            <a:spAutoFit/>
-          </a:bodyPr>
-          <a:lstStyle/>
-          <a:p>
-            <a:pPr algn="l"/>
-            <a:r>
-              <a:rPr sz="1500" b="0">
+          <a:p>
+            <a:pPr algn="l">
+              <a:lnSpc>
+                <a:spcPct val="110000"/>
+              </a:lnSpc>
+              <a:spcBef>
+                <a:spcPts val="0"/>
+              </a:spcBef>
+              <a:spcAft>
+                <a:spcPts val="800"/>
+              </a:spcAft>
+            </a:pPr>
+            <a:r>
+              <a:rPr sz="1200">
                 <a:solidFill>
                   <a:srgbClr val="102A43"/>
                 </a:solidFill>
@@ -6142,31 +5834,15 @@
               <a:t>This is the content experience the field rep promised to the doctor and the source of the later engagement metrics.</a:t>
             </a:r>
           </a:p>
-        </p:txBody>
-      </p:sp>
-      <p:sp>
-        <p:nvSpPr>
-          <p:cNvPr id="13" name="TextBox 12"/>
-          <p:cNvSpPr txBox="1"/>
-          <p:nvPr/>
-        </p:nvSpPr>
-        <p:spPr>
-          <a:xfrm>
-            <a:off x="749808" y="4069080"/>
-            <a:ext cx="4023360" cy="256032"/>
-          </a:xfrm>
-          <a:prstGeom prst="rect">
-            <a:avLst/>
-          </a:prstGeom>
-          <a:noFill/>
-        </p:spPr>
-        <p:txBody>
-          <a:bodyPr wrap="square" anchor="t">
-            <a:spAutoFit/>
-          </a:bodyPr>
-          <a:lstStyle/>
-          <a:p>
-            <a:pPr algn="l"/>
+          <a:p>
+            <a:pPr algn="l">
+              <a:spcBef>
+                <a:spcPts val="0"/>
+              </a:spcBef>
+              <a:spcAft>
+                <a:spcPts val="200"/>
+              </a:spcAft>
+            </a:pPr>
             <a:r>
               <a:rPr sz="1200" b="1">
                 <a:solidFill>
@@ -6177,33 +5853,20 @@
               <a:t>Expected result</a:t>
             </a:r>
           </a:p>
-        </p:txBody>
-      </p:sp>
-      <p:sp>
-        <p:nvSpPr>
-          <p:cNvPr id="14" name="TextBox 13"/>
-          <p:cNvSpPr txBox="1"/>
-          <p:nvPr/>
-        </p:nvSpPr>
-        <p:spPr>
-          <a:xfrm>
-            <a:off x="749808" y="4325112"/>
-            <a:ext cx="3931920" cy="566928"/>
-          </a:xfrm>
-          <a:prstGeom prst="rect">
-            <a:avLst/>
-          </a:prstGeom>
-          <a:noFill/>
-        </p:spPr>
-        <p:txBody>
-          <a:bodyPr wrap="square" anchor="t">
-            <a:spAutoFit/>
-          </a:bodyPr>
-          <a:lstStyle/>
-          <a:p>
-            <a:pPr algn="l"/>
-            <a:r>
-              <a:rPr sz="1500" b="0">
+          <a:p>
+            <a:pPr algn="l">
+              <a:lnSpc>
+                <a:spcPct val="110000"/>
+              </a:lnSpc>
+              <a:spcBef>
+                <a:spcPts val="0"/>
+              </a:spcBef>
+              <a:spcAft>
+                <a:spcPts val="800"/>
+              </a:spcAft>
+            </a:pPr>
+            <a:r>
+              <a:rPr sz="1200">
                 <a:solidFill>
                   <a:srgbClr val="102A43"/>
                 </a:solidFill>
@@ -6212,31 +5875,15 @@
               <a:t>Doctor engagement events can be captured and reflected in downstream reporting.</a:t>
             </a:r>
           </a:p>
-        </p:txBody>
-      </p:sp>
-      <p:sp>
-        <p:nvSpPr>
-          <p:cNvPr id="15" name="TextBox 14"/>
-          <p:cNvSpPr txBox="1"/>
-          <p:nvPr/>
-        </p:nvSpPr>
-        <p:spPr>
-          <a:xfrm>
-            <a:off x="749808" y="4965192"/>
-            <a:ext cx="4023360" cy="256032"/>
-          </a:xfrm>
-          <a:prstGeom prst="rect">
-            <a:avLst/>
-          </a:prstGeom>
-          <a:noFill/>
-        </p:spPr>
-        <p:txBody>
-          <a:bodyPr wrap="square" anchor="t">
-            <a:spAutoFit/>
-          </a:bodyPr>
-          <a:lstStyle/>
-          <a:p>
-            <a:pPr algn="l"/>
+          <a:p>
+            <a:pPr algn="l">
+              <a:spcBef>
+                <a:spcPts val="0"/>
+              </a:spcBef>
+              <a:spcAft>
+                <a:spcPts val="200"/>
+              </a:spcAft>
+            </a:pPr>
             <a:r>
               <a:rPr sz="1200" b="1">
                 <a:solidFill>
@@ -6247,33 +5894,20 @@
               <a:t>Trainer note</a:t>
             </a:r>
           </a:p>
-        </p:txBody>
-      </p:sp>
-      <p:sp>
-        <p:nvSpPr>
-          <p:cNvPr id="16" name="TextBox 15"/>
-          <p:cNvSpPr txBox="1"/>
-          <p:nvPr/>
-        </p:nvSpPr>
-        <p:spPr>
-          <a:xfrm>
-            <a:off x="749808" y="5212080"/>
-            <a:ext cx="3931920" cy="640080"/>
-          </a:xfrm>
-          <a:prstGeom prst="rect">
-            <a:avLst/>
-          </a:prstGeom>
-          <a:noFill/>
-        </p:spPr>
-        <p:txBody>
-          <a:bodyPr wrap="square" anchor="t">
-            <a:spAutoFit/>
-          </a:bodyPr>
-          <a:lstStyle/>
-          <a:p>
-            <a:pPr algn="l"/>
-            <a:r>
-              <a:rPr sz="1300" b="0">
+          <a:p>
+            <a:pPr algn="l">
+              <a:lnSpc>
+                <a:spcPct val="110000"/>
+              </a:lnSpc>
+              <a:spcBef>
+                <a:spcPts val="0"/>
+              </a:spcBef>
+              <a:spcAft>
+                <a:spcPts val="0"/>
+              </a:spcAft>
+            </a:pPr>
+            <a:r>
+              <a:rPr sz="1100">
                 <a:solidFill>
                   <a:srgbClr val="52667A"/>
                 </a:solidFill>
@@ -6286,7 +5920,7 @@
       </p:sp>
       <p:sp>
         <p:nvSpPr>
-          <p:cNvPr id="17" name="Rounded Rectangle 16"/>
+          <p:cNvPr id="8" name="Rounded Rectangle 7"/>
           <p:cNvSpPr/>
           <p:nvPr/>
         </p:nvSpPr>
@@ -6331,7 +5965,7 @@
       </p:sp>
       <p:sp>
         <p:nvSpPr>
-          <p:cNvPr id="18" name="TextBox 17"/>
+          <p:cNvPr id="9" name="TextBox 8"/>
           <p:cNvSpPr txBox="1"/>
           <p:nvPr/>
         </p:nvSpPr>
@@ -6366,7 +6000,7 @@
       </p:sp>
       <p:pic>
         <p:nvPicPr>
-          <p:cNvPr id="19" name="Picture 18" descr="doctor-viewer.png"/>
+          <p:cNvPr id="10" name="Picture 9" descr="doctor-viewer.png"/>
           <p:cNvPicPr>
             <a:picLocks noChangeAspect="1"/>
           </p:cNvPicPr>
@@ -6390,7 +6024,7 @@
       </p:pic>
       <p:sp>
         <p:nvSpPr>
-          <p:cNvPr id="20" name="TextBox 19"/>
+          <p:cNvPr id="11" name="TextBox 10"/>
           <p:cNvSpPr txBox="1"/>
           <p:nvPr/>
         </p:nvSpPr>
@@ -6425,7 +6059,7 @@
       </p:sp>
       <p:sp>
         <p:nvSpPr>
-          <p:cNvPr id="21" name="TextBox 20"/>
+          <p:cNvPr id="12" name="TextBox 11"/>
           <p:cNvSpPr txBox="1"/>
           <p:nvPr/>
         </p:nvSpPr>
@@ -6698,7 +6332,7 @@
         <p:spPr>
           <a:xfrm>
             <a:off x="749808" y="1097280"/>
-            <a:ext cx="4023360" cy="256032"/>
+            <a:ext cx="3931920" cy="4754880"/>
           </a:xfrm>
           <a:prstGeom prst="rect">
             <a:avLst/>
@@ -6706,12 +6340,19 @@
           <a:noFill/>
         </p:spPr>
         <p:txBody>
-          <a:bodyPr wrap="square" anchor="t">
+          <a:bodyPr wrap="square" lIns="0" rIns="0" tIns="0" bIns="0">
             <a:spAutoFit/>
           </a:bodyPr>
           <a:lstStyle/>
           <a:p>
-            <a:pPr algn="l"/>
+            <a:pPr algn="l">
+              <a:spcBef>
+                <a:spcPts val="0"/>
+              </a:spcBef>
+              <a:spcAft>
+                <a:spcPts val="200"/>
+              </a:spcAft>
+            </a:pPr>
             <a:r>
               <a:rPr sz="1200" b="1">
                 <a:solidFill>
@@ -6722,33 +6363,20 @@
               <a:t>User action</a:t>
             </a:r>
           </a:p>
-        </p:txBody>
-      </p:sp>
-      <p:sp>
-        <p:nvSpPr>
-          <p:cNvPr id="8" name="TextBox 7"/>
-          <p:cNvSpPr txBox="1"/>
-          <p:nvPr/>
-        </p:nvSpPr>
-        <p:spPr>
-          <a:xfrm>
-            <a:off x="749808" y="1353312"/>
-            <a:ext cx="3931920" cy="621792"/>
-          </a:xfrm>
-          <a:prstGeom prst="rect">
-            <a:avLst/>
-          </a:prstGeom>
-          <a:noFill/>
-        </p:spPr>
-        <p:txBody>
-          <a:bodyPr wrap="square" anchor="t">
-            <a:spAutoFit/>
-          </a:bodyPr>
-          <a:lstStyle/>
-          <a:p>
-            <a:pPr algn="l"/>
-            <a:r>
-              <a:rPr sz="1600" b="0">
+          <a:p>
+            <a:pPr algn="l">
+              <a:lnSpc>
+                <a:spcPct val="110000"/>
+              </a:lnSpc>
+              <a:spcBef>
+                <a:spcPts val="0"/>
+              </a:spcBef>
+              <a:spcAft>
+                <a:spcPts val="800"/>
+              </a:spcAft>
+            </a:pPr>
+            <a:r>
+              <a:rPr sz="1300">
                 <a:solidFill>
                   <a:srgbClr val="102A43"/>
                 </a:solidFill>
@@ -6757,31 +6385,15 @@
               <a:t>Open older collateral from the archive cards or launch the webinar link.</a:t>
             </a:r>
           </a:p>
-        </p:txBody>
-      </p:sp>
-      <p:sp>
-        <p:nvSpPr>
-          <p:cNvPr id="9" name="TextBox 8"/>
-          <p:cNvSpPr txBox="1"/>
-          <p:nvPr/>
-        </p:nvSpPr>
-        <p:spPr>
-          <a:xfrm>
-            <a:off x="749808" y="2011680"/>
-            <a:ext cx="4023360" cy="256032"/>
-          </a:xfrm>
-          <a:prstGeom prst="rect">
-            <a:avLst/>
-          </a:prstGeom>
-          <a:noFill/>
-        </p:spPr>
-        <p:txBody>
-          <a:bodyPr wrap="square" anchor="t">
-            <a:spAutoFit/>
-          </a:bodyPr>
-          <a:lstStyle/>
-          <a:p>
-            <a:pPr algn="l"/>
+          <a:p>
+            <a:pPr algn="l">
+              <a:spcBef>
+                <a:spcPts val="0"/>
+              </a:spcBef>
+              <a:spcAft>
+                <a:spcPts val="200"/>
+              </a:spcAft>
+            </a:pPr>
             <a:r>
               <a:rPr sz="1200" b="1">
                 <a:solidFill>
@@ -6792,33 +6404,20 @@
               <a:t>What appears on screen</a:t>
             </a:r>
           </a:p>
-        </p:txBody>
-      </p:sp>
-      <p:sp>
-        <p:nvSpPr>
-          <p:cNvPr id="10" name="TextBox 9"/>
-          <p:cNvSpPr txBox="1"/>
-          <p:nvPr/>
-        </p:nvSpPr>
-        <p:spPr>
-          <a:xfrm>
-            <a:off x="749808" y="2267712"/>
-            <a:ext cx="3931920" cy="713232"/>
-          </a:xfrm>
-          <a:prstGeom prst="rect">
-            <a:avLst/>
-          </a:prstGeom>
-          <a:noFill/>
-        </p:spPr>
-        <p:txBody>
-          <a:bodyPr wrap="square" anchor="t">
-            <a:spAutoFit/>
-          </a:bodyPr>
-          <a:lstStyle/>
-          <a:p>
-            <a:pPr algn="l"/>
-            <a:r>
-              <a:rPr sz="1600" b="0">
+          <a:p>
+            <a:pPr algn="l">
+              <a:lnSpc>
+                <a:spcPct val="110000"/>
+              </a:lnSpc>
+              <a:spcBef>
+                <a:spcPts val="0"/>
+              </a:spcBef>
+              <a:spcAft>
+                <a:spcPts val="800"/>
+              </a:spcAft>
+            </a:pPr>
+            <a:r>
+              <a:rPr sz="1300">
                 <a:solidFill>
                   <a:srgbClr val="102A43"/>
                 </a:solidFill>
@@ -6827,31 +6426,15 @@
               <a:t>Additional campaign content options such as archive cards or a webinar panel below the primary collateral.</a:t>
             </a:r>
           </a:p>
-        </p:txBody>
-      </p:sp>
-      <p:sp>
-        <p:nvSpPr>
-          <p:cNvPr id="11" name="TextBox 10"/>
-          <p:cNvSpPr txBox="1"/>
-          <p:nvPr/>
-        </p:nvSpPr>
-        <p:spPr>
-          <a:xfrm>
-            <a:off x="749808" y="3063240"/>
-            <a:ext cx="4023360" cy="256032"/>
-          </a:xfrm>
-          <a:prstGeom prst="rect">
-            <a:avLst/>
-          </a:prstGeom>
-          <a:noFill/>
-        </p:spPr>
-        <p:txBody>
-          <a:bodyPr wrap="square" anchor="t">
-            <a:spAutoFit/>
-          </a:bodyPr>
-          <a:lstStyle/>
-          <a:p>
-            <a:pPr algn="l"/>
+          <a:p>
+            <a:pPr algn="l">
+              <a:spcBef>
+                <a:spcPts val="0"/>
+              </a:spcBef>
+              <a:spcAft>
+                <a:spcPts val="200"/>
+              </a:spcAft>
+            </a:pPr>
             <a:r>
               <a:rPr sz="1200" b="1">
                 <a:solidFill>
@@ -6862,33 +6445,20 @@
               <a:t>Why it matters</a:t>
             </a:r>
           </a:p>
-        </p:txBody>
-      </p:sp>
-      <p:sp>
-        <p:nvSpPr>
-          <p:cNvPr id="12" name="TextBox 11"/>
-          <p:cNvSpPr txBox="1"/>
-          <p:nvPr/>
-        </p:nvSpPr>
-        <p:spPr>
-          <a:xfrm>
-            <a:off x="749808" y="3319272"/>
-            <a:ext cx="3931920" cy="640080"/>
-          </a:xfrm>
-          <a:prstGeom prst="rect">
-            <a:avLst/>
-          </a:prstGeom>
-          <a:noFill/>
-        </p:spPr>
-        <p:txBody>
-          <a:bodyPr wrap="square" anchor="t">
-            <a:spAutoFit/>
-          </a:bodyPr>
-          <a:lstStyle/>
-          <a:p>
-            <a:pPr algn="l"/>
-            <a:r>
-              <a:rPr sz="1500" b="0">
+          <a:p>
+            <a:pPr algn="l">
+              <a:lnSpc>
+                <a:spcPct val="110000"/>
+              </a:lnSpc>
+              <a:spcBef>
+                <a:spcPts val="0"/>
+              </a:spcBef>
+              <a:spcAft>
+                <a:spcPts val="800"/>
+              </a:spcAft>
+            </a:pPr>
+            <a:r>
+              <a:rPr sz="1300">
                 <a:solidFill>
                   <a:srgbClr val="102A43"/>
                 </a:solidFill>
@@ -6897,31 +6467,15 @@
               <a:t>The product can extend beyond a single PDF or video and act as a campaign micro-journey for the doctor.</a:t>
             </a:r>
           </a:p>
-        </p:txBody>
-      </p:sp>
-      <p:sp>
-        <p:nvSpPr>
-          <p:cNvPr id="13" name="TextBox 12"/>
-          <p:cNvSpPr txBox="1"/>
-          <p:nvPr/>
-        </p:nvSpPr>
-        <p:spPr>
-          <a:xfrm>
-            <a:off x="749808" y="4069080"/>
-            <a:ext cx="4023360" cy="256032"/>
-          </a:xfrm>
-          <a:prstGeom prst="rect">
-            <a:avLst/>
-          </a:prstGeom>
-          <a:noFill/>
-        </p:spPr>
-        <p:txBody>
-          <a:bodyPr wrap="square" anchor="t">
-            <a:spAutoFit/>
-          </a:bodyPr>
-          <a:lstStyle/>
-          <a:p>
-            <a:pPr algn="l"/>
+          <a:p>
+            <a:pPr algn="l">
+              <a:spcBef>
+                <a:spcPts val="0"/>
+              </a:spcBef>
+              <a:spcAft>
+                <a:spcPts val="200"/>
+              </a:spcAft>
+            </a:pPr>
             <a:r>
               <a:rPr sz="1200" b="1">
                 <a:solidFill>
@@ -6932,33 +6486,20 @@
               <a:t>Expected result</a:t>
             </a:r>
           </a:p>
-        </p:txBody>
-      </p:sp>
-      <p:sp>
-        <p:nvSpPr>
-          <p:cNvPr id="14" name="TextBox 13"/>
-          <p:cNvSpPr txBox="1"/>
-          <p:nvPr/>
-        </p:nvSpPr>
-        <p:spPr>
-          <a:xfrm>
-            <a:off x="749808" y="4325112"/>
-            <a:ext cx="3931920" cy="566928"/>
-          </a:xfrm>
-          <a:prstGeom prst="rect">
-            <a:avLst/>
-          </a:prstGeom>
-          <a:noFill/>
-        </p:spPr>
-        <p:txBody>
-          <a:bodyPr wrap="square" anchor="t">
-            <a:spAutoFit/>
-          </a:bodyPr>
-          <a:lstStyle/>
-          <a:p>
-            <a:pPr algn="l"/>
-            <a:r>
-              <a:rPr sz="1500" b="0">
+          <a:p>
+            <a:pPr algn="l">
+              <a:lnSpc>
+                <a:spcPct val="110000"/>
+              </a:lnSpc>
+              <a:spcBef>
+                <a:spcPts val="0"/>
+              </a:spcBef>
+              <a:spcAft>
+                <a:spcPts val="800"/>
+              </a:spcAft>
+            </a:pPr>
+            <a:r>
+              <a:rPr sz="1300">
                 <a:solidFill>
                   <a:srgbClr val="102A43"/>
                 </a:solidFill>
@@ -6967,31 +6508,15 @@
               <a:t>The doctor can discover related material without needing a separate share from the rep.</a:t>
             </a:r>
           </a:p>
-        </p:txBody>
-      </p:sp>
-      <p:sp>
-        <p:nvSpPr>
-          <p:cNvPr id="15" name="TextBox 14"/>
-          <p:cNvSpPr txBox="1"/>
-          <p:nvPr/>
-        </p:nvSpPr>
-        <p:spPr>
-          <a:xfrm>
-            <a:off x="749808" y="4965192"/>
-            <a:ext cx="4023360" cy="256032"/>
-          </a:xfrm>
-          <a:prstGeom prst="rect">
-            <a:avLst/>
-          </a:prstGeom>
-          <a:noFill/>
-        </p:spPr>
-        <p:txBody>
-          <a:bodyPr wrap="square" anchor="t">
-            <a:spAutoFit/>
-          </a:bodyPr>
-          <a:lstStyle/>
-          <a:p>
-            <a:pPr algn="l"/>
+          <a:p>
+            <a:pPr algn="l">
+              <a:spcBef>
+                <a:spcPts val="0"/>
+              </a:spcBef>
+              <a:spcAft>
+                <a:spcPts val="200"/>
+              </a:spcAft>
+            </a:pPr>
             <a:r>
               <a:rPr sz="1200" b="1">
                 <a:solidFill>
@@ -7002,33 +6527,20 @@
               <a:t>Trainer note</a:t>
             </a:r>
           </a:p>
-        </p:txBody>
-      </p:sp>
-      <p:sp>
-        <p:nvSpPr>
-          <p:cNvPr id="16" name="TextBox 15"/>
-          <p:cNvSpPr txBox="1"/>
-          <p:nvPr/>
-        </p:nvSpPr>
-        <p:spPr>
-          <a:xfrm>
-            <a:off x="749808" y="5212080"/>
-            <a:ext cx="3931920" cy="640080"/>
-          </a:xfrm>
-          <a:prstGeom prst="rect">
-            <a:avLst/>
-          </a:prstGeom>
-          <a:noFill/>
-        </p:spPr>
-        <p:txBody>
-          <a:bodyPr wrap="square" anchor="t">
-            <a:spAutoFit/>
-          </a:bodyPr>
-          <a:lstStyle/>
-          <a:p>
-            <a:pPr algn="l"/>
-            <a:r>
-              <a:rPr sz="1300" b="0">
+          <a:p>
+            <a:pPr algn="l">
+              <a:lnSpc>
+                <a:spcPct val="110000"/>
+              </a:lnSpc>
+              <a:spcBef>
+                <a:spcPts val="0"/>
+              </a:spcBef>
+              <a:spcAft>
+                <a:spcPts val="0"/>
+              </a:spcAft>
+            </a:pPr>
+            <a:r>
+              <a:rPr sz="1200">
                 <a:solidFill>
                   <a:srgbClr val="52667A"/>
                 </a:solidFill>
@@ -7041,7 +6553,7 @@
       </p:sp>
       <p:sp>
         <p:nvSpPr>
-          <p:cNvPr id="17" name="Rounded Rectangle 16"/>
+          <p:cNvPr id="8" name="Rounded Rectangle 7"/>
           <p:cNvSpPr/>
           <p:nvPr/>
         </p:nvSpPr>
@@ -7086,7 +6598,7 @@
       </p:sp>
       <p:sp>
         <p:nvSpPr>
-          <p:cNvPr id="18" name="TextBox 17"/>
+          <p:cNvPr id="9" name="TextBox 8"/>
           <p:cNvSpPr txBox="1"/>
           <p:nvPr/>
         </p:nvSpPr>
@@ -7121,7 +6633,7 @@
       </p:sp>
       <p:pic>
         <p:nvPicPr>
-          <p:cNvPr id="19" name="Picture 18" descr="doctor-viewer-archive.png"/>
+          <p:cNvPr id="10" name="Picture 9" descr="doctor-viewer-archive.png"/>
           <p:cNvPicPr>
             <a:picLocks noChangeAspect="1"/>
           </p:cNvPicPr>
@@ -7145,7 +6657,7 @@
       </p:pic>
       <p:sp>
         <p:nvSpPr>
-          <p:cNvPr id="20" name="TextBox 19"/>
+          <p:cNvPr id="11" name="TextBox 10"/>
           <p:cNvSpPr txBox="1"/>
           <p:nvPr/>
         </p:nvSpPr>
@@ -7180,7 +6692,7 @@
       </p:sp>
       <p:sp>
         <p:nvSpPr>
-          <p:cNvPr id="21" name="TextBox 20"/>
+          <p:cNvPr id="12" name="TextBox 11"/>
           <p:cNvSpPr txBox="1"/>
           <p:nvPr/>
         </p:nvSpPr>
